--- a/reports/Zomato_Unit_Economics_&_Risk_Simulator_(FY24).pptx
+++ b/reports/Zomato_Unit_Economics_&_Risk_Simulator_(FY24).pptx
@@ -118,7 +118,41 @@
       </a:defRPr>
     </a:lvl9pPr>
   </p:defaultTextStyle>
+  <p:extLst>
+    <p:ext uri="{EFAFB233-063F-42B5-8137-9DF3F51BA10A}">
+      <p15:sldGuideLst xmlns:p15="http://schemas.microsoft.com/office/powerpoint/2012/main"/>
+    </p:ext>
+  </p:extLst>
 </p:presentation>
+</file>
+
+<file path=ppt/changesInfos/changesInfo1.xml><?xml version="1.0" encoding="utf-8"?>
+<pc:chgInfo xmlns:a="http://schemas.openxmlformats.org/drawingml/2006/main" xmlns:r="http://schemas.openxmlformats.org/officeDocument/2006/relationships" xmlns:ac="http://schemas.microsoft.com/office/drawing/2013/main/command" xmlns:pc="http://schemas.microsoft.com/office/powerpoint/2013/main/command">
+  <pc:docChgLst>
+    <pc:chgData name="Kushagra Bansal" userId="3d71df4d4eda243c" providerId="LiveId" clId="{DB6E0569-4B58-4AC7-A511-4565BE34C581}"/>
+    <pc:docChg chg="modSld">
+      <pc:chgData name="Kushagra Bansal" userId="3d71df4d4eda243c" providerId="LiveId" clId="{DB6E0569-4B58-4AC7-A511-4565BE34C581}" dt="2025-12-18T09:55:49.789" v="0" actId="14100"/>
+      <pc:docMkLst>
+        <pc:docMk/>
+      </pc:docMkLst>
+      <pc:sldChg chg="modSp mod">
+        <pc:chgData name="Kushagra Bansal" userId="3d71df4d4eda243c" providerId="LiveId" clId="{DB6E0569-4B58-4AC7-A511-4565BE34C581}" dt="2025-12-18T09:55:49.789" v="0" actId="14100"/>
+        <pc:sldMkLst>
+          <pc:docMk/>
+          <pc:sldMk cId="2812043131" sldId="256"/>
+        </pc:sldMkLst>
+        <pc:picChg chg="mod">
+          <ac:chgData name="Kushagra Bansal" userId="3d71df4d4eda243c" providerId="LiveId" clId="{DB6E0569-4B58-4AC7-A511-4565BE34C581}" dt="2025-12-18T09:55:49.789" v="0" actId="14100"/>
+          <ac:picMkLst>
+            <pc:docMk/>
+            <pc:sldMk cId="2812043131" sldId="256"/>
+            <ac:picMk id="2" creationId="{EBC78C7A-8BEA-F6C3-1274-CA1FA2B6746B}"/>
+          </ac:picMkLst>
+        </pc:picChg>
+      </pc:sldChg>
+    </pc:docChg>
+  </pc:docChgLst>
+</pc:chgInfo>
 </file>
 
 <file path=ppt/notesMasters/notesMaster1.xml><?xml version="1.0" encoding="utf-8"?>
@@ -203,7 +237,7 @@
           <a:p>
             <a:fld id="{EB8E35A3-5964-4CBC-BC6B-53A5E65DDAB7}" type="datetimeFigureOut">
               <a:rPr lang="en-IN" smtClean="0"/>
-              <a:t>11-12-2025</a:t>
+              <a:t>18-12-2025</a:t>
             </a:fld>
             <a:endParaRPr lang="en-IN"/>
           </a:p>
@@ -708,7 +742,7 @@
           <a:p>
             <a:fld id="{D1D1EADE-8E88-4C7C-8AC5-FB148DE4940E}" type="datetime1">
               <a:rPr lang="en-US" smtClean="0"/>
-              <a:t>12/9/2025</a:t>
+              <a:t>12/18/2025</a:t>
             </a:fld>
             <a:endParaRPr lang="en-US"/>
           </a:p>
@@ -908,7 +942,7 @@
           <a:p>
             <a:fld id="{EC3C8B9C-477D-492A-96AD-1FC2CC997A73}" type="datetime1">
               <a:rPr lang="en-US" smtClean="0"/>
-              <a:t>12/9/2025</a:t>
+              <a:t>12/18/2025</a:t>
             </a:fld>
             <a:endParaRPr lang="en-US"/>
           </a:p>
@@ -1118,7 +1152,7 @@
           <a:p>
             <a:fld id="{42D3AED5-E26D-4E29-B1B3-7847B6779594}" type="datetime1">
               <a:rPr lang="en-US" smtClean="0"/>
-              <a:t>12/9/2025</a:t>
+              <a:t>12/18/2025</a:t>
             </a:fld>
             <a:endParaRPr lang="en-US"/>
           </a:p>
@@ -1318,7 +1352,7 @@
           <a:p>
             <a:fld id="{157B6794-849E-4626-908B-D15793550EFB}" type="datetime1">
               <a:rPr lang="en-US" smtClean="0"/>
-              <a:t>12/9/2025</a:t>
+              <a:t>12/18/2025</a:t>
             </a:fld>
             <a:endParaRPr lang="en-US"/>
           </a:p>
@@ -1594,7 +1628,7 @@
           <a:p>
             <a:fld id="{63DB64E7-5594-42A3-ADBF-E95A7ACEAD64}" type="datetime1">
               <a:rPr lang="en-US" smtClean="0"/>
-              <a:t>12/9/2025</a:t>
+              <a:t>12/18/2025</a:t>
             </a:fld>
             <a:endParaRPr lang="en-US"/>
           </a:p>
@@ -1867,7 +1901,7 @@
           <a:p>
             <a:fld id="{18462B0B-D248-4FFB-8695-AD7FA4B1284A}" type="datetime1">
               <a:rPr lang="en-US" smtClean="0"/>
-              <a:t>12/9/2025</a:t>
+              <a:t>12/18/2025</a:t>
             </a:fld>
             <a:endParaRPr lang="en-US"/>
           </a:p>
@@ -2290,7 +2324,7 @@
           <a:p>
             <a:fld id="{D0378EFB-9159-4510-B73F-4F0409ADE937}" type="datetime1">
               <a:rPr lang="en-US" smtClean="0"/>
-              <a:t>12/9/2025</a:t>
+              <a:t>12/18/2025</a:t>
             </a:fld>
             <a:endParaRPr lang="en-US"/>
           </a:p>
@@ -2432,7 +2466,7 @@
           <a:p>
             <a:fld id="{89BC9412-2452-4BED-A324-9D8C115361AD}" type="datetime1">
               <a:rPr lang="en-US" smtClean="0"/>
-              <a:t>12/9/2025</a:t>
+              <a:t>12/18/2025</a:t>
             </a:fld>
             <a:endParaRPr lang="en-US"/>
           </a:p>
@@ -2545,7 +2579,7 @@
           <a:p>
             <a:fld id="{F5318F62-D251-40E8-A23C-F4CFE9FEAB41}" type="datetime1">
               <a:rPr lang="en-US" smtClean="0"/>
-              <a:t>12/9/2025</a:t>
+              <a:t>12/18/2025</a:t>
             </a:fld>
             <a:endParaRPr lang="en-US"/>
           </a:p>
@@ -2858,7 +2892,7 @@
           <a:p>
             <a:fld id="{44F76144-149E-4874-93A5-554A0357CF82}" type="datetime1">
               <a:rPr lang="en-US" smtClean="0"/>
-              <a:t>12/9/2025</a:t>
+              <a:t>12/18/2025</a:t>
             </a:fld>
             <a:endParaRPr lang="en-US"/>
           </a:p>
@@ -3151,7 +3185,7 @@
           <a:p>
             <a:fld id="{50BA65D8-0540-4835-AE5C-25D29DBA01BE}" type="datetime1">
               <a:rPr lang="en-US" smtClean="0"/>
-              <a:t>12/9/2025</a:t>
+              <a:t>12/18/2025</a:t>
             </a:fld>
             <a:endParaRPr lang="en-US"/>
           </a:p>
@@ -3393,7 +3427,7 @@
           <a:p>
             <a:fld id="{E31BA835-12AC-4E8F-955A-EA3F4DE2791F}" type="datetime1">
               <a:rPr lang="en-US" smtClean="0"/>
-              <a:t>12/9/2025</a:t>
+              <a:t>12/18/2025</a:t>
             </a:fld>
             <a:endParaRPr lang="en-US"/>
           </a:p>
@@ -4146,8 +4180,8 @@
         </p:blipFill>
         <p:spPr>
           <a:xfrm>
-            <a:off x="6326272" y="10"/>
-            <a:ext cx="5865727" cy="6857990"/>
+            <a:off x="5825706" y="10"/>
+            <a:ext cx="6366293" cy="6857990"/>
           </a:xfrm>
           <a:prstGeom prst="rect">
             <a:avLst/>
